--- a/data/knowledge/policy/installment-policy-2026.10.1.pptx
+++ b/data/knowledge/policy/installment-policy-2026.10.1.pptx
@@ -14,6 +14,9 @@
     <p:sldId id="262" r:id="rId13"/>
     <p:sldId id="263" r:id="rId14"/>
     <p:sldId id="264" r:id="rId15"/>
+    <p:sldId id="265" r:id="rId16"/>
+    <p:sldId id="266" r:id="rId17"/>
+    <p:sldId id="267" r:id="rId18"/>
   </p:sldIdLst>
   <p:sldSz cx="9144000" cy="6858000" type="screen4x3"/>
   <p:notesSz cx="6858000" cy="9144000"/>
@@ -3133,7 +3136,460 @@
           <a:lstStyle/>
           <a:p>
             <a:r>
-              <a:t>版本 2026.10.1 · 生效日期 2026-09-01</a:t>
+              <a:t>版本 2026.10.1 · 生效日期 2026-10-01</a:t>
+            </a:r>
+          </a:p>
+        </p:txBody>
+      </p:sp>
+    </p:spTree>
+  </p:cSld>
+  <p:clrMapOvr>
+    <a:masterClrMapping/>
+  </p:clrMapOvr>
+</p:sld>
+</file>
+
+<file path=ppt/slides/slide10.xml><?xml version="1.0" encoding="utf-8"?>
+<p:sld xmlns:a="http://schemas.openxmlformats.org/drawingml/2006/main" xmlns:p="http://schemas.openxmlformats.org/presentationml/2006/main" xmlns:r="http://schemas.openxmlformats.org/officeDocument/2006/relationships">
+  <p:cSld>
+    <p:spTree>
+      <p:nvGrpSpPr>
+        <p:cNvPr id="1" name=""/>
+        <p:cNvGrpSpPr/>
+        <p:nvPr/>
+      </p:nvGrpSpPr>
+      <p:grpSpPr/>
+      <p:sp>
+        <p:nvSpPr>
+          <p:cNvPr id="2" name="Title 1"/>
+          <p:cNvSpPr>
+            <a:spLocks noGrp="1"/>
+          </p:cNvSpPr>
+          <p:nvPr>
+            <p:ph type="title"/>
+          </p:nvPr>
+        </p:nvSpPr>
+        <p:spPr/>
+        <p:txBody>
+          <a:bodyPr/>
+          <a:lstStyle/>
+          <a:p>
+            <a:r>
+              <a:t>附录：分期情形速查</a:t>
+            </a:r>
+          </a:p>
+        </p:txBody>
+      </p:sp>
+      <p:sp>
+        <p:nvSpPr>
+          <p:cNvPr id="3" name="Content Placeholder 2"/>
+          <p:cNvSpPr>
+            <a:spLocks noGrp="1"/>
+          </p:cNvSpPr>
+          <p:nvPr>
+            <p:ph idx="1"/>
+          </p:nvPr>
+        </p:nvSpPr>
+        <p:spPr/>
+        <p:txBody>
+          <a:bodyPr/>
+          <a:lstStyle/>
+          <a:p>
+            <a:pPr>
+              <a:defRPr sz="1600"/>
+            </a:pPr>
+            <a:r>
+              <a:t>情形一：支持几期。结论：3 期、6 期与 12 期，以结算页展示为准。</a:t>
+            </a:r>
+          </a:p>
+          <a:p>
+            <a:pPr>
+              <a:defRPr sz="1600"/>
+            </a:pPr>
+            <a:r>
+              <a:t>情形二：3 期有手续费吗。结论：免手续费。</a:t>
+            </a:r>
+          </a:p>
+          <a:p>
+            <a:pPr>
+              <a:defRPr sz="1600"/>
+            </a:pPr>
+            <a:r>
+              <a:t>情形三：6 期有手续费吗。结论：按银行或支付渠道标准收取。</a:t>
+            </a:r>
+          </a:p>
+          <a:p>
+            <a:pPr>
+              <a:defRPr sz="1600"/>
+            </a:pPr>
+            <a:r>
+              <a:t>情形四：12 期有手续费吗。结论：按银行或支付渠道标准收取。</a:t>
+            </a:r>
+          </a:p>
+          <a:p>
+            <a:pPr>
+              <a:defRPr sz="1600"/>
+            </a:pPr>
+            <a:r>
+              <a:t>情形五：手续费退吗。结论：不予退还。</a:t>
+            </a:r>
+          </a:p>
+          <a:p>
+            <a:pPr>
+              <a:defRPr sz="1600"/>
+            </a:pPr>
+            <a:r>
+              <a:t>情形六：分期订单退款手续费退吗。结论：已收取的不予退还。</a:t>
+            </a:r>
+          </a:p>
+          <a:p>
+            <a:pPr>
+              <a:defRPr sz="1600"/>
+            </a:pPr>
+            <a:r>
+              <a:t>情形七：剩余期数怎么处理。结论：由支付渠道终止。</a:t>
+            </a:r>
+          </a:p>
+          <a:p>
+            <a:pPr>
+              <a:defRPr sz="1600"/>
+            </a:pPr>
+            <a:r>
+              <a:t>情形八：分期能叠加优惠券吗。结论：可以。</a:t>
+            </a:r>
+          </a:p>
+          <a:p>
+            <a:pPr>
+              <a:defRPr sz="1600"/>
+            </a:pPr>
+            <a:r>
+              <a:t>情形九：提前还款收费吗。结论：已收取的手续费不予退还。</a:t>
+            </a:r>
+          </a:p>
+          <a:p>
+            <a:pPr>
+              <a:defRPr sz="1600"/>
+            </a:pPr>
+            <a:r>
+              <a:t>情形十：分期谁审批。结论：由支付渠道独立审批。</a:t>
+            </a:r>
+          </a:p>
+          <a:p>
+            <a:pPr>
+              <a:defRPr sz="1600"/>
+            </a:pPr>
+            <a:r>
+              <a:t>情形十一：逾期谁负责。结论：按渠道协议处理。</a:t>
+            </a:r>
+          </a:p>
+          <a:p>
+            <a:pPr>
+              <a:defRPr sz="1600"/>
+            </a:pPr>
+            <a:r>
+              <a:t>情形十二：哪些商品支持分期。结论：部分商品，以结算页展示为准。</a:t>
+            </a:r>
+          </a:p>
+          <a:p>
+            <a:pPr>
+              <a:defRPr sz="1600"/>
+            </a:pPr>
+            <a:r>
+              <a:t>情形十三：手续费参与门槛计算吗。结论：不参与。</a:t>
+            </a:r>
+          </a:p>
+          <a:p>
+            <a:pPr>
+              <a:defRPr sz="1600"/>
+            </a:pPr>
+            <a:r>
+              <a:t>情形十四：商城参与授信吗。结论：不参与授信决策。</a:t>
+            </a:r>
+          </a:p>
+        </p:txBody>
+      </p:sp>
+    </p:spTree>
+  </p:cSld>
+  <p:clrMapOvr>
+    <a:masterClrMapping/>
+  </p:clrMapOvr>
+</p:sld>
+</file>
+
+<file path=ppt/slides/slide11.xml><?xml version="1.0" encoding="utf-8"?>
+<p:sld xmlns:a="http://schemas.openxmlformats.org/drawingml/2006/main" xmlns:p="http://schemas.openxmlformats.org/presentationml/2006/main" xmlns:r="http://schemas.openxmlformats.org/officeDocument/2006/relationships">
+  <p:cSld>
+    <p:spTree>
+      <p:nvGrpSpPr>
+        <p:cNvPr id="1" name=""/>
+        <p:cNvGrpSpPr/>
+        <p:nvPr/>
+      </p:nvGrpSpPr>
+      <p:grpSpPr/>
+      <p:sp>
+        <p:nvSpPr>
+          <p:cNvPr id="2" name="Title 1"/>
+          <p:cNvSpPr>
+            <a:spLocks noGrp="1"/>
+          </p:cNvSpPr>
+          <p:nvPr>
+            <p:ph type="title"/>
+          </p:nvPr>
+        </p:nvSpPr>
+        <p:spPr/>
+        <p:txBody>
+          <a:bodyPr/>
+          <a:lstStyle/>
+          <a:p>
+            <a:r>
+              <a:t>附录：分期口径问答</a:t>
+            </a:r>
+          </a:p>
+        </p:txBody>
+      </p:sp>
+      <p:sp>
+        <p:nvSpPr>
+          <p:cNvPr id="3" name="Content Placeholder 2"/>
+          <p:cNvSpPr>
+            <a:spLocks noGrp="1"/>
+          </p:cNvSpPr>
+          <p:nvPr>
+            <p:ph idx="1"/>
+          </p:nvPr>
+        </p:nvSpPr>
+        <p:spPr/>
+        <p:txBody>
+          <a:bodyPr/>
+          <a:lstStyle/>
+          <a:p>
+            <a:pPr>
+              <a:defRPr sz="1600"/>
+            </a:pPr>
+            <a:r>
+              <a:t>问题一：支持几期？答复：3 期、6 期与 12 期。</a:t>
+            </a:r>
+          </a:p>
+          <a:p>
+            <a:pPr>
+              <a:defRPr sz="1600"/>
+            </a:pPr>
+            <a:r>
+              <a:t>问题二：3 期手续费？答复：免手续费。</a:t>
+            </a:r>
+          </a:p>
+          <a:p>
+            <a:pPr>
+              <a:defRPr sz="1600"/>
+            </a:pPr>
+            <a:r>
+              <a:t>问题三：6 期与 12 期手续费？答复：按渠道标准收取。</a:t>
+            </a:r>
+          </a:p>
+          <a:p>
+            <a:pPr>
+              <a:defRPr sz="1600"/>
+            </a:pPr>
+            <a:r>
+              <a:t>问题四：手续费退吗？答复：不予退还。</a:t>
+            </a:r>
+          </a:p>
+          <a:p>
+            <a:pPr>
+              <a:defRPr sz="1600"/>
+            </a:pPr>
+            <a:r>
+              <a:t>问题五：退款后手续费？答复：已收取的不退。</a:t>
+            </a:r>
+          </a:p>
+          <a:p>
+            <a:pPr>
+              <a:defRPr sz="1600"/>
+            </a:pPr>
+            <a:r>
+              <a:t>问题六：剩余期数？答复：由支付渠道终止。</a:t>
+            </a:r>
+          </a:p>
+          <a:p>
+            <a:pPr>
+              <a:defRPr sz="1600"/>
+            </a:pPr>
+            <a:r>
+              <a:t>问题七：提前还款？答复：通过支付渠道办理。</a:t>
+            </a:r>
+          </a:p>
+          <a:p>
+            <a:pPr>
+              <a:defRPr sz="1600"/>
+            </a:pPr>
+            <a:r>
+              <a:t>问题八：能叠加优惠券吗？答复：可以。</a:t>
+            </a:r>
+          </a:p>
+          <a:p>
+            <a:pPr>
+              <a:defRPr sz="1600"/>
+            </a:pPr>
+            <a:r>
+              <a:t>问题九：谁审批？答复：支付渠道独立审批。</a:t>
+            </a:r>
+          </a:p>
+          <a:p>
+            <a:pPr>
+              <a:defRPr sz="1600"/>
+            </a:pPr>
+            <a:r>
+              <a:t>问题十：逾期责任？答复：按渠道协议处理。</a:t>
+            </a:r>
+          </a:p>
+          <a:p>
+            <a:pPr>
+              <a:defRPr sz="1600"/>
+            </a:pPr>
+            <a:r>
+              <a:t>问题十一：哪些商品支持？答复：部分商品，以结算页为准。</a:t>
+            </a:r>
+          </a:p>
+          <a:p>
+            <a:pPr>
+              <a:defRPr sz="1600"/>
+            </a:pPr>
+            <a:r>
+              <a:t>问题十二：商城参与授信吗？答复：不参与。</a:t>
+            </a:r>
+          </a:p>
+        </p:txBody>
+      </p:sp>
+    </p:spTree>
+  </p:cSld>
+  <p:clrMapOvr>
+    <a:masterClrMapping/>
+  </p:clrMapOvr>
+</p:sld>
+</file>
+
+<file path=ppt/slides/slide12.xml><?xml version="1.0" encoding="utf-8"?>
+<p:sld xmlns:a="http://schemas.openxmlformats.org/drawingml/2006/main" xmlns:p="http://schemas.openxmlformats.org/presentationml/2006/main" xmlns:r="http://schemas.openxmlformats.org/officeDocument/2006/relationships">
+  <p:cSld>
+    <p:spTree>
+      <p:nvGrpSpPr>
+        <p:cNvPr id="1" name=""/>
+        <p:cNvGrpSpPr/>
+        <p:nvPr/>
+      </p:nvGrpSpPr>
+      <p:grpSpPr/>
+      <p:sp>
+        <p:nvSpPr>
+          <p:cNvPr id="2" name="Title 1"/>
+          <p:cNvSpPr>
+            <a:spLocks noGrp="1"/>
+          </p:cNvSpPr>
+          <p:nvPr>
+            <p:ph type="title"/>
+          </p:nvPr>
+        </p:nvSpPr>
+        <p:spPr/>
+        <p:txBody>
+          <a:bodyPr/>
+          <a:lstStyle/>
+          <a:p>
+            <a:r>
+              <a:t>附录：分期规则边界与例外</a:t>
+            </a:r>
+          </a:p>
+        </p:txBody>
+      </p:sp>
+      <p:sp>
+        <p:nvSpPr>
+          <p:cNvPr id="3" name="Content Placeholder 2"/>
+          <p:cNvSpPr>
+            <a:spLocks noGrp="1"/>
+          </p:cNvSpPr>
+          <p:nvPr>
+            <p:ph idx="1"/>
+          </p:nvPr>
+        </p:nvSpPr>
+        <p:spPr/>
+        <p:txBody>
+          <a:bodyPr/>
+          <a:lstStyle/>
+          <a:p>
+            <a:pPr>
+              <a:defRPr sz="1600"/>
+            </a:pPr>
+            <a:r>
+              <a:t>边界一：分期支持 3 期、6 期与 12 期，以结算页展示为准。</a:t>
+            </a:r>
+          </a:p>
+          <a:p>
+            <a:pPr>
+              <a:defRPr sz="1600"/>
+            </a:pPr>
+            <a:r>
+              <a:t>边界二：3 期免手续费。</a:t>
+            </a:r>
+          </a:p>
+          <a:p>
+            <a:pPr>
+              <a:defRPr sz="1600"/>
+            </a:pPr>
+            <a:r>
+              <a:t>边界三：6 期与 12 期按银行或支付渠道标准收取手续费。</a:t>
+            </a:r>
+          </a:p>
+          <a:p>
+            <a:pPr>
+              <a:defRPr sz="1600"/>
+            </a:pPr>
+            <a:r>
+              <a:t>边界四：已收取的手续费不予退还。</a:t>
+            </a:r>
+          </a:p>
+          <a:p>
+            <a:pPr>
+              <a:defRPr sz="1600"/>
+            </a:pPr>
+            <a:r>
+              <a:t>边界五：分期订单退款时剩余期数由支付渠道终止。</a:t>
+            </a:r>
+          </a:p>
+          <a:p>
+            <a:pPr>
+              <a:defRPr sz="1600"/>
+            </a:pPr>
+            <a:r>
+              <a:t>边界六：分期由支付渠道独立审批，商城不参与授信。</a:t>
+            </a:r>
+          </a:p>
+          <a:p>
+            <a:pPr>
+              <a:defRPr sz="1600"/>
+            </a:pPr>
+            <a:r>
+              <a:t>边界七：逾期责任按渠道协议处理。</a:t>
+            </a:r>
+          </a:p>
+          <a:p>
+            <a:pPr>
+              <a:defRPr sz="1600"/>
+            </a:pPr>
+            <a:r>
+              <a:t>边界八：分期可叠加优惠券，优惠在首期体现。</a:t>
+            </a:r>
+          </a:p>
+          <a:p>
+            <a:pPr>
+              <a:defRPr sz="1600"/>
+            </a:pPr>
+            <a:r>
+              <a:t>边界九：手续费不参与优惠券门槛计算。</a:t>
+            </a:r>
+          </a:p>
+          <a:p>
+            <a:pPr>
+              <a:defRPr sz="1600"/>
+            </a:pPr>
+            <a:r>
+              <a:t>边界十：分期规则以当前生效版本为准。</a:t>
             </a:r>
           </a:p>
         </p:txBody>
